--- a/Rural.pptx
+++ b/Rural.pptx
@@ -277,7 +277,7 @@
           </c:val>
           <c:extLst>
             <c:ext xmlns:c16="http://schemas.microsoft.com/office/drawing/2014/chart" uri="{C3380CC4-5D6E-409C-BE32-E72D297353CC}">
-              <c16:uniqueId val="{00000000-AA66-E54F-9328-AC0C462CF3F7}"/>
+              <c16:uniqueId val="{00000000-8C9F-0146-BB21-1E96F344647B}"/>
             </c:ext>
           </c:extLst>
         </c:ser>
@@ -376,7 +376,7 @@
           </c:val>
           <c:extLst>
             <c:ext xmlns:c16="http://schemas.microsoft.com/office/drawing/2014/chart" uri="{C3380CC4-5D6E-409C-BE32-E72D297353CC}">
-              <c16:uniqueId val="{00000001-AA66-E54F-9328-AC0C462CF3F7}"/>
+              <c16:uniqueId val="{00000001-8C9F-0146-BB21-1E96F344647B}"/>
             </c:ext>
           </c:extLst>
         </c:ser>
@@ -682,7 +682,7 @@
           </c:val>
           <c:extLst>
             <c:ext xmlns:c16="http://schemas.microsoft.com/office/drawing/2014/chart" uri="{C3380CC4-5D6E-409C-BE32-E72D297353CC}">
-              <c16:uniqueId val="{00000000-25D2-4643-8741-B22339B3D040}"/>
+              <c16:uniqueId val="{00000000-1078-B940-B486-A6371C32CA5A}"/>
             </c:ext>
           </c:extLst>
         </c:ser>
@@ -885,7 +885,7 @@
             <c:bubble3D val="0"/>
             <c:extLst>
               <c:ext xmlns:c16="http://schemas.microsoft.com/office/drawing/2014/chart" uri="{C3380CC4-5D6E-409C-BE32-E72D297353CC}">
-                <c16:uniqueId val="{00000001-CC6A-2740-BBB1-D34D58B372CD}"/>
+                <c16:uniqueId val="{00000001-79B8-2544-992E-DC509E5A4C32}"/>
               </c:ext>
             </c:extLst>
           </c:dPt>
@@ -901,7 +901,7 @@
             </c:spPr>
             <c:extLst>
               <c:ext xmlns:c16="http://schemas.microsoft.com/office/drawing/2014/chart" uri="{C3380CC4-5D6E-409C-BE32-E72D297353CC}">
-                <c16:uniqueId val="{00000003-CC6A-2740-BBB1-D34D58B372CD}"/>
+                <c16:uniqueId val="{00000003-79B8-2544-992E-DC509E5A4C32}"/>
               </c:ext>
             </c:extLst>
           </c:dPt>
@@ -973,7 +973,7 @@
           </c:val>
           <c:extLst>
             <c:ext xmlns:c16="http://schemas.microsoft.com/office/drawing/2014/chart" uri="{C3380CC4-5D6E-409C-BE32-E72D297353CC}">
-              <c16:uniqueId val="{00000004-CC6A-2740-BBB1-D34D58B372CD}"/>
+              <c16:uniqueId val="{00000004-79B8-2544-992E-DC509E5A4C32}"/>
             </c:ext>
           </c:extLst>
         </c:ser>
@@ -1256,7 +1256,7 @@
           </c:val>
           <c:extLst>
             <c:ext xmlns:c16="http://schemas.microsoft.com/office/drawing/2014/chart" uri="{C3380CC4-5D6E-409C-BE32-E72D297353CC}">
-              <c16:uniqueId val="{00000000-80A6-BB4F-8CC3-9E9A1A98F736}"/>
+              <c16:uniqueId val="{00000000-0D3D-EC4E-867F-5DBCDCDC5B34}"/>
             </c:ext>
           </c:extLst>
         </c:ser>
@@ -1367,7 +1367,7 @@
           </c:val>
           <c:extLst>
             <c:ext xmlns:c16="http://schemas.microsoft.com/office/drawing/2014/chart" uri="{C3380CC4-5D6E-409C-BE32-E72D297353CC}">
-              <c16:uniqueId val="{00000001-80A6-BB4F-8CC3-9E9A1A98F736}"/>
+              <c16:uniqueId val="{00000001-0D3D-EC4E-867F-5DBCDCDC5B34}"/>
             </c:ext>
           </c:extLst>
         </c:ser>
@@ -1589,7 +1589,7 @@
             <c:bubble3D val="0"/>
             <c:extLst>
               <c:ext xmlns:c16="http://schemas.microsoft.com/office/drawing/2014/chart" uri="{C3380CC4-5D6E-409C-BE32-E72D297353CC}">
-                <c16:uniqueId val="{00000001-BA8B-9F43-A162-7C52BE22E5CC}"/>
+                <c16:uniqueId val="{00000001-8202-5B46-9CB6-AFBFF1B34B36}"/>
               </c:ext>
             </c:extLst>
           </c:dPt>
@@ -1605,7 +1605,7 @@
             </c:spPr>
             <c:extLst>
               <c:ext xmlns:c16="http://schemas.microsoft.com/office/drawing/2014/chart" uri="{C3380CC4-5D6E-409C-BE32-E72D297353CC}">
-                <c16:uniqueId val="{00000003-BA8B-9F43-A162-7C52BE22E5CC}"/>
+                <c16:uniqueId val="{00000003-8202-5B46-9CB6-AFBFF1B34B36}"/>
               </c:ext>
             </c:extLst>
           </c:dPt>
@@ -1677,7 +1677,7 @@
           </c:val>
           <c:extLst>
             <c:ext xmlns:c16="http://schemas.microsoft.com/office/drawing/2014/chart" uri="{C3380CC4-5D6E-409C-BE32-E72D297353CC}">
-              <c16:uniqueId val="{00000004-BA8B-9F43-A162-7C52BE22E5CC}"/>
+              <c16:uniqueId val="{00000004-8202-5B46-9CB6-AFBFF1B34B36}"/>
             </c:ext>
           </c:extLst>
         </c:ser>
@@ -1832,7 +1832,7 @@
               </a:defRPr>
             </a:pPr>
             <a:r>
-              <a:rPr lang="en-US" sz="1150" b="0" i="0" u="none" strike="noStrike">
+              <a:rPr sz="1150" b="0" i="0" u="none" strike="noStrike">
                 <a:solidFill>
                   <a:srgbClr val="12202E"/>
                 </a:solidFill>
@@ -1879,7 +1879,7 @@
             <c:bubble3D val="0"/>
             <c:extLst>
               <c:ext xmlns:c16="http://schemas.microsoft.com/office/drawing/2014/chart" uri="{C3380CC4-5D6E-409C-BE32-E72D297353CC}">
-                <c16:uniqueId val="{00000001-01D8-4342-BDDA-2B2C873E1D92}"/>
+                <c16:uniqueId val="{00000001-2B6A-8B48-BD48-4BB9B410A380}"/>
               </c:ext>
             </c:extLst>
           </c:dPt>
@@ -1895,7 +1895,7 @@
             </c:spPr>
             <c:extLst>
               <c:ext xmlns:c16="http://schemas.microsoft.com/office/drawing/2014/chart" uri="{C3380CC4-5D6E-409C-BE32-E72D297353CC}">
-                <c16:uniqueId val="{00000003-01D8-4342-BDDA-2B2C873E1D92}"/>
+                <c16:uniqueId val="{00000003-2B6A-8B48-BD48-4BB9B410A380}"/>
               </c:ext>
             </c:extLst>
           </c:dPt>
@@ -1969,7 +1969,7 @@
           </c:val>
           <c:extLst>
             <c:ext xmlns:c16="http://schemas.microsoft.com/office/drawing/2014/chart" uri="{C3380CC4-5D6E-409C-BE32-E72D297353CC}">
-              <c16:uniqueId val="{00000004-01D8-4342-BDDA-2B2C873E1D92}"/>
+              <c16:uniqueId val="{00000004-2B6A-8B48-BD48-4BB9B410A380}"/>
             </c:ext>
           </c:extLst>
         </c:ser>
@@ -2125,7 +2125,7 @@
               </a:defRPr>
             </a:pPr>
             <a:r>
-              <a:rPr lang="en-US" sz="1150" b="0" i="0" u="none" strike="noStrike">
+              <a:rPr sz="1150" b="0" i="0" u="none" strike="noStrike">
                 <a:solidFill>
                   <a:srgbClr val="12202E"/>
                 </a:solidFill>
@@ -2172,7 +2172,7 @@
             <c:bubble3D val="0"/>
             <c:extLst>
               <c:ext xmlns:c16="http://schemas.microsoft.com/office/drawing/2014/chart" uri="{C3380CC4-5D6E-409C-BE32-E72D297353CC}">
-                <c16:uniqueId val="{00000001-DDC2-F94F-8576-01183577DA52}"/>
+                <c16:uniqueId val="{00000001-AB00-2F4A-89AE-BE1D0E97FD94}"/>
               </c:ext>
             </c:extLst>
           </c:dPt>
@@ -2188,7 +2188,7 @@
             </c:spPr>
             <c:extLst>
               <c:ext xmlns:c16="http://schemas.microsoft.com/office/drawing/2014/chart" uri="{C3380CC4-5D6E-409C-BE32-E72D297353CC}">
-                <c16:uniqueId val="{00000003-DDC2-F94F-8576-01183577DA52}"/>
+                <c16:uniqueId val="{00000003-AB00-2F4A-89AE-BE1D0E97FD94}"/>
               </c:ext>
             </c:extLst>
           </c:dPt>
@@ -2260,7 +2260,7 @@
           </c:val>
           <c:extLst>
             <c:ext xmlns:c16="http://schemas.microsoft.com/office/drawing/2014/chart" uri="{C3380CC4-5D6E-409C-BE32-E72D297353CC}">
-              <c16:uniqueId val="{00000004-DDC2-F94F-8576-01183577DA52}"/>
+              <c16:uniqueId val="{00000004-AB00-2F4A-89AE-BE1D0E97FD94}"/>
             </c:ext>
           </c:extLst>
         </c:ser>
@@ -2419,7 +2419,7 @@
     </p:spTree>
     <p:extLst>
       <p:ext uri="{BB962C8B-B14F-4D97-AF65-F5344CB8AC3E}">
-        <p14:creationId xmlns:p14="http://schemas.microsoft.com/office/powerpoint/2010/main" val="2425246103"/>
+        <p14:creationId xmlns:p14="http://schemas.microsoft.com/office/powerpoint/2010/main" val="3627227183"/>
       </p:ext>
     </p:extLst>
   </p:cSld>
@@ -3510,7 +3510,9 @@
           <a:p>
             <a:r>
               <a:rPr lang="en-US" dirty="0"/>
-              <a:t>Thirty to sixty seconds. Assume nobody in the room has read the statute. The essential points: this is a mandated report with a deadline, it is written in the agency's name, and the question it asks is loaded - it presumes rural credit unions are in trouble. The next slide gives away what we found.</a:t>
+              <a:t>Thirty to sixty seconds. Assume nobody in the room has read the statute. The essential points: this is a mandated report with a deadline, written in the agency's name.
+On the provenance, if asked: Section 909 descends from a standalone member bill, the Rural Depositories Revitalization Study Act, which covered only the bank regulators and carried a six-month deadline. The credit union leg and the one-year deadline came later. It carries no findings clause, no hearing record on rural depository conditions that we could locate, and no CBO cost estimate. So the presumption of underperformance is an implication of the drafting, not a formal finding of Congress - which is exactly why we can test it without appearing to dispute anything Congress decided.
+The next slide gives away what we found.</a:t>
             </a:r>
           </a:p>
         </p:txBody>
@@ -4441,7 +4443,7 @@
             <a:r>
               <a:rPr lang="en-US" dirty="0"/>
               <a:t>If you take one slide, take this one. Everything after is evidence for these four numbers.
-On survival, if asked how it is measured: we compare institutions that are alike on size, capital, earnings and state, and ask which is more likely to vanish in a given quarter. Rural ones are about a quarter less likely. The raw figures are 37% of rural credit unions gone over the period against 44% elsewhere. This matters because it kills the obvious objection - that rural credit unions look strong only because the weak ones already disappeared. They disappear LESS, and they still outperform.</a:t>
+On survival: the 25% figure holds between institutions of the same size and financial condition, not just in the raw comparison. If asked how it is measured: we compare institutions that are alike on size, capital, earnings and state, and ask which is more likely to vanish in a given quarter. Rural ones are about a quarter less likely. The raw figures are 37% of rural credit unions gone over the period against 44% elsewhere. This matters because it kills the obvious objection - that rural credit unions look strong only because the weak ones already disappeared. They disappear LESS, and they still outperform.</a:t>
             </a:r>
           </a:p>
         </p:txBody>
@@ -9352,8 +9354,8 @@
         </p:nvSpPr>
         <p:spPr>
           <a:xfrm>
-            <a:off x="640080" y="1298448"/>
-            <a:ext cx="10881360" cy="566928"/>
+            <a:off x="640080" y="1243584"/>
+            <a:ext cx="10881360" cy="603504"/>
           </a:xfrm>
           <a:prstGeom prst="rect">
             <a:avLst/>
@@ -9372,17 +9374,37 @@
               <a:buNone/>
             </a:pPr>
             <a:r>
-              <a:rPr lang="en-US" sz="1350" dirty="0">
-                <a:solidFill>
-                  <a:srgbClr val="5B6B72"/>
+              <a:rPr lang="en-US" sz="1300" b="1" dirty="0">
+                <a:solidFill>
+                  <a:srgbClr val="12202E"/>
                 </a:solidFill>
                 <a:latin typeface="Calibri" pitchFamily="34" charset="0"/>
                 <a:ea typeface="Calibri" pitchFamily="34" charset="-122"/>
                 <a:cs typeface="Calibri" pitchFamily="34" charset="-120"/>
               </a:rPr>
-              <a:t>How we got from a suspicion to a test we could not argue our way out of.</a:t>
-            </a:r>
-            <a:endParaRPr lang="en-US" sz="1350" dirty="0"/>
+              <a:t>Q1  ·  Are rural credit unions different because they are rural, or just because they are small?</a:t>
+            </a:r>
+            <a:endParaRPr lang="en-US" sz="1300" dirty="0"/>
+          </a:p>
+          <a:p>
+            <a:pPr marL="0" indent="0">
+              <a:lnSpc>
+                <a:spcPts val="1900"/>
+              </a:lnSpc>
+              <a:buNone/>
+            </a:pPr>
+            <a:r>
+              <a:rPr lang="en-US" sz="1300" dirty="0">
+                <a:solidFill>
+                  <a:srgbClr val="5B6B72"/>
+                </a:solidFill>
+                <a:latin typeface="Calibri" pitchFamily="34" charset="0"/>
+                <a:ea typeface="Calibri" pitchFamily="34" charset="-122"/>
+                <a:cs typeface="Calibri" pitchFamily="34" charset="-120"/>
+              </a:rPr>
+              <a:t>Every recommendation in the report depends on the answer. Here is how we got from a suspicion to a test we could not argue our way out of.</a:t>
+            </a:r>
+            <a:endParaRPr lang="en-US" sz="1300" dirty="0"/>
           </a:p>
         </p:txBody>
       </p:sp>
@@ -15732,7 +15754,7 @@
                 <a:ea typeface="Calibri" pitchFamily="34" charset="-122"/>
                 <a:cs typeface="Calibri" pitchFamily="34" charset="-120"/>
               </a:rPr>
-              <a:t>“Entries” includes charter conversions, so genuine de novo formation is lower still — the honest number is below one a year.</a:t>
+              <a:t>“Entries” includes charters that converted from another form, so the number of genuinely new credit unions is lower still.</a:t>
             </a:r>
             <a:endParaRPr lang="en-US" sz="1150" dirty="0"/>
           </a:p>
@@ -15756,7 +15778,7 @@
                 <a:ea typeface="Calibri" pitchFamily="34" charset="-122"/>
                 <a:cs typeface="Calibri" pitchFamily="34" charset="-120"/>
               </a:rPr>
-              <a:t>This is the direct answer to the de novo clause of Sec. 909, and the strongest single finding in the study.</a:t>
+              <a:t>This is the direct answer to the part of Sec. 909 about barriers to starting new rural credit unions, and the strongest single finding so far.</a:t>
             </a:r>
             <a:endParaRPr lang="en-US" sz="1150" dirty="0"/>
           </a:p>
@@ -15824,7 +15846,7 @@
         <p:spPr>
           <a:xfrm>
             <a:off x="960120" y="4937760"/>
-            <a:ext cx="5029200" cy="256032"/>
+            <a:ext cx="5943600" cy="256032"/>
           </a:xfrm>
           <a:prstGeom prst="rect">
             <a:avLst/>
@@ -15848,7 +15870,7 @@
                 <a:ea typeface="Calibri" pitchFamily="34" charset="-122"/>
                 <a:cs typeface="Calibri" pitchFamily="34" charset="-120"/>
               </a:rPr>
-              <a:t>Replacement rates make the asymmetry concrete</a:t>
+              <a:t>For every 100 that closed, how many opened?</a:t>
             </a:r>
             <a:endParaRPr lang="en-US" sz="1200" dirty="0"/>
           </a:p>
@@ -15887,7 +15909,7 @@
                 <a:ea typeface="Cambria" pitchFamily="34" charset="-122"/>
                 <a:cs typeface="Cambria" pitchFamily="34" charset="-120"/>
               </a:rPr>
-              <a:t>~17%</a:t>
+              <a:t>17</a:t>
             </a:r>
             <a:endParaRPr lang="en-US" sz="1900" dirty="0"/>
           </a:p>
@@ -15926,7 +15948,7 @@
                 <a:ea typeface="Calibri" pitchFamily="34" charset="-122"/>
                 <a:cs typeface="Calibri" pitchFamily="34" charset="-120"/>
               </a:rPr>
-              <a:t>Rural institutions</a:t>
+              <a:t>Rural credit unions</a:t>
             </a:r>
             <a:endParaRPr lang="en-US" sz="1050" dirty="0"/>
           </a:p>
@@ -15965,7 +15987,7 @@
                 <a:ea typeface="Cambria" pitchFamily="34" charset="-122"/>
                 <a:cs typeface="Cambria" pitchFamily="34" charset="-120"/>
               </a:rPr>
-              <a:t>~12%</a:t>
+              <a:t>12</a:t>
             </a:r>
             <a:endParaRPr lang="en-US" sz="1900" dirty="0"/>
           </a:p>
@@ -16004,7 +16026,7 @@
                 <a:ea typeface="Calibri" pitchFamily="34" charset="-122"/>
                 <a:cs typeface="Calibri" pitchFamily="34" charset="-120"/>
               </a:rPr>
-              <a:t>Urban institutions</a:t>
+              <a:t>Non-rural credit unions</a:t>
             </a:r>
             <a:endParaRPr lang="en-US" sz="1050" dirty="0"/>
           </a:p>
@@ -16043,7 +16065,7 @@
                 <a:ea typeface="Cambria" pitchFamily="34" charset="-122"/>
                 <a:cs typeface="Cambria" pitchFamily="34" charset="-120"/>
               </a:rPr>
-              <a:t>104.8%</a:t>
+              <a:t>105</a:t>
             </a:r>
             <a:endParaRPr lang="en-US" sz="1900" dirty="0"/>
           </a:p>
@@ -16121,7 +16143,7 @@
                 <a:ea typeface="Cambria" pitchFamily="34" charset="-122"/>
                 <a:cs typeface="Cambria" pitchFamily="34" charset="-120"/>
               </a:rPr>
-              <a:t>97.2%</a:t>
+              <a:t>97</a:t>
             </a:r>
             <a:endParaRPr lang="en-US" sz="1900" dirty="0"/>
           </a:p>
@@ -16160,7 +16182,7 @@
                 <a:ea typeface="Calibri" pitchFamily="34" charset="-122"/>
                 <a:cs typeface="Calibri" pitchFamily="34" charset="-120"/>
               </a:rPr>
-              <a:t>Urban offices</a:t>
+              <a:t>Non-rural offices</a:t>
             </a:r>
             <a:endParaRPr lang="en-US" sz="1050" dirty="0"/>
           </a:p>
@@ -16199,7 +16221,7 @@
                 <a:ea typeface="Calibri" pitchFamily="34" charset="-122"/>
                 <a:cs typeface="Calibri" pitchFamily="34" charset="-120"/>
               </a:rPr>
-              <a:t>Charters are not being replaced anywhere in the system — but in rural areas formation has effectively stopped, while rural offices are more than replaced.</a:t>
+              <a:t>Credit unions are not being replaced anywhere in the system. But rural offices are more than replaced — the institutions that remain keep opening them.</a:t>
             </a:r>
             <a:endParaRPr lang="en-US" sz="900" dirty="0"/>
           </a:p>
@@ -17518,13 +17540,13 @@
             <a:r>
               <a:rPr lang="en-US" sz="1200" b="1" dirty="0">
                 <a:solidFill>
-                  <a:srgbClr val="1F6F78"/>
+                  <a:srgbClr val="C8553D"/>
                 </a:solidFill>
                 <a:latin typeface="Calibri" pitchFamily="34" charset="0"/>
                 <a:ea typeface="Calibri" pitchFamily="34" charset="-122"/>
                 <a:cs typeface="Calibri" pitchFamily="34" charset="-120"/>
               </a:rPr>
-              <a:t>Everything here is a first pass.</a:t>
+              <a:t>Our measure of access is crude.</a:t>
             </a:r>
             <a:endParaRPr lang="en-US" sz="1200" dirty="0"/>
           </a:p>
@@ -17566,7 +17588,7 @@
                 <a:ea typeface="Calibri" pitchFamily="34" charset="-122"/>
                 <a:cs typeface="Calibri" pitchFamily="34" charset="-120"/>
               </a:rPr>
-              <a:t>Nothing has been re-run on the final sample. Figures will move. Two classification questions — how Hawaii's island counties should be treated, and whether minority-designated institutions are undercounted — are still open.</a:t>
+              <a:t>Today a county either has an office or it does not. Someone living three miles over the county line counts as unserved. Two refinements are planned: credit an office in a neighbouring county, and adopt the Federal Reserve’s ten-mile rural standard for a banking desert. Both will shrink the gap; neither will close it.</a:t>
             </a:r>
             <a:endParaRPr lang="en-US" sz="1000" dirty="0"/>
           </a:p>
@@ -17605,7 +17627,7 @@
                 <a:ea typeface="Calibri" pitchFamily="34" charset="-122"/>
                 <a:cs typeface="Calibri" pitchFamily="34" charset="-120"/>
               </a:rPr>
-              <a:t>The first two are the ones that would change what the report recommends. The rest change how confidently it can be written.</a:t>
+              <a:t>The first two would change what the report recommends. The rest change how confidently it can be written. All figures remain a first pass and will be re-estimated on the final sample.</a:t>
             </a:r>
             <a:endParaRPr lang="en-US" sz="900" dirty="0"/>
           </a:p>
@@ -19927,7 +19949,7 @@
                 <a:ea typeface="Calibri" pitchFamily="34" charset="-122"/>
                 <a:cs typeface="Calibri" pitchFamily="34" charset="-120"/>
               </a:rPr>
-              <a:t>Point the recommendations at formation</a:t>
+              <a:t>Two routes, not one</a:t>
             </a:r>
             <a:endParaRPr lang="en-US" sz="1050" dirty="0"/>
           </a:p>
@@ -19969,7 +19991,7 @@
                 <a:ea typeface="Calibri" pitchFamily="34" charset="-122"/>
                 <a:cs typeface="Calibri" pitchFamily="34" charset="-120"/>
               </a:rPr>
-              <a:t>Toward the chartering pathway, initial capital and the rules for new entrants — not at fixing institutions the evidence says are not broken.</a:t>
+              <a:t>Extending an existing credit union into an unserved county is far cheaper than chartering a new one — and it is how 68 rural counties gained their first office over the decade. Recommend both, and price them.</a:t>
             </a:r>
             <a:endParaRPr lang="en-US" sz="850" dirty="0"/>
           </a:p>
@@ -20037,7 +20059,7 @@
                 <a:ea typeface="Calibri" pitchFamily="34" charset="-122"/>
                 <a:cs typeface="Calibri" pitchFamily="34" charset="-120"/>
               </a:rPr>
-              <a:t>Report access alongside formation</a:t>
+              <a:t>A branch is not a charter</a:t>
             </a:r>
             <a:endParaRPr lang="en-US" sz="1050" dirty="0"/>
           </a:p>
@@ -20079,7 +20101,7 @@
                 <a:ea typeface="Calibri" pitchFamily="34" charset="-122"/>
                 <a:cs typeface="Calibri" pitchFamily="34" charset="-120"/>
               </a:rPr>
-              <a:t>Rural offices grew and are more than replaced when they close. Leaving that out would overstate the harm and invite a correction.</a:t>
+              <a:t>A branch delivers services; a charter delivers local ownership and local credit decisions. If Congress wants access, back the incumbents. If it wants local control, only formation gets there.</a:t>
             </a:r>
             <a:endParaRPr lang="en-US" sz="850" dirty="0"/>
           </a:p>
@@ -20189,7 +20211,7 @@
                 <a:ea typeface="Calibri" pitchFamily="34" charset="-122"/>
                 <a:cs typeface="Calibri" pitchFamily="34" charset="-120"/>
               </a:rPr>
-              <a:t>Demography sets a ceiling. The honest offer is a better path to a new charter and a real number for what one costs.</a:t>
+              <a:t>No rule change puts people back into a county that is emptying out. We can price the cheaper route to coverage, and what a new charter costs — not promise growth.</a:t>
             </a:r>
             <a:endParaRPr lang="en-US" sz="850" dirty="0"/>
           </a:p>
@@ -20530,7 +20552,7 @@
                 <a:ea typeface="Calibri" pitchFamily="34" charset="-122"/>
                 <a:cs typeface="Calibri" pitchFamily="34" charset="-120"/>
               </a:rPr>
-              <a:t>The ROAD to Housing Act was enacted. Section 909 sits among nine provisions about community banks and credit unions.</a:t>
+              <a:t>Section 909 began as a standalone bill aimed at banks. The credit union half was added as it moved, and it was folded into the ROAD to Housing Act.</a:t>
             </a:r>
             <a:endParaRPr lang="en-US" sz="1050" dirty="0"/>
           </a:p>
@@ -21168,12 +21190,12 @@
         </p:nvSpPr>
         <p:spPr>
           <a:xfrm>
-            <a:off x="640080" y="5623560"/>
-            <a:ext cx="10881360" cy="621792"/>
+            <a:off x="640080" y="5532120"/>
+            <a:ext cx="10881360" cy="804672"/>
           </a:xfrm>
           <a:prstGeom prst="roundRect">
             <a:avLst>
-              <a:gd name="adj" fmla="val 7353"/>
+              <a:gd name="adj" fmla="val 5682"/>
             </a:avLst>
           </a:prstGeom>
           <a:solidFill>
@@ -21197,24 +21219,27 @@
         </p:nvSpPr>
         <p:spPr>
           <a:xfrm>
-            <a:off x="960120" y="5623560"/>
-            <a:ext cx="10241280" cy="621792"/>
-          </a:xfrm>
-          <a:prstGeom prst="rect">
-            <a:avLst/>
-          </a:prstGeom>
-          <a:noFill/>
-          <a:ln/>
-        </p:spPr>
-        <p:txBody>
-          <a:bodyPr wrap="square" lIns="0" tIns="0" rIns="0" bIns="0" rtlCol="0" anchor="ctr"/>
-          <a:lstStyle/>
-          <a:p>
-            <a:pPr marL="0" indent="0">
-              <a:buNone/>
-            </a:pPr>
-            <a:r>
-              <a:rPr lang="en-US" sz="1200" dirty="0">
+            <a:off x="960120" y="5577840"/>
+            <a:ext cx="10241280" cy="713232"/>
+          </a:xfrm>
+          <a:prstGeom prst="rect">
+            <a:avLst/>
+          </a:prstGeom>
+          <a:noFill/>
+          <a:ln/>
+        </p:spPr>
+        <p:txBody>
+          <a:bodyPr wrap="square" lIns="0" tIns="0" rIns="0" bIns="0" rtlCol="0" anchor="ctr"/>
+          <a:lstStyle/>
+          <a:p>
+            <a:pPr marL="0" indent="0">
+              <a:lnSpc>
+                <a:spcPts val="1500"/>
+              </a:lnSpc>
+              <a:buNone/>
+            </a:pPr>
+            <a:r>
+              <a:rPr lang="en-US" sz="1150" dirty="0">
                 <a:solidFill>
                   <a:srgbClr val="FFFFFF"/>
                 </a:solidFill>
@@ -21222,9 +21247,9 @@
                 <a:ea typeface="Calibri" pitchFamily="34" charset="-122"/>
                 <a:cs typeface="Calibri" pitchFamily="34" charset="-120"/>
               </a:rPr>
-              <a:t>The one thing to notice: the statute already assumes an answer — that these institutions are underperforming. Our first job was to test that assumption rather than illustrate it.</a:t>
-            </a:r>
-            <a:endParaRPr lang="en-US" sz="1200" dirty="0"/>
+              <a:t>The one thing to notice: Congress made no finding that rural credit unions are underperforming. The presumption sits in the wording — we are told to find ways to IMPROVE growth, capital and earnings, which takes for granted that there is something to improve. Testing that first is not arguing with Congress; it is answering the question properly.</a:t>
+            </a:r>
+            <a:endParaRPr lang="en-US" sz="1150" dirty="0"/>
           </a:p>
         </p:txBody>
       </p:sp>
@@ -32622,7 +32647,7 @@
                 <a:ea typeface="Cambria" pitchFamily="34" charset="-122"/>
                 <a:cs typeface="Cambria" pitchFamily="34" charset="-120"/>
               </a:rPr>
-              <a:t>+1.03 pp</a:t>
+              <a:t>+1.0 point</a:t>
             </a:r>
             <a:endParaRPr lang="en-US" sz="2600" dirty="0"/>
           </a:p>
@@ -32664,7 +32689,7 @@
                 <a:ea typeface="Calibri" pitchFamily="34" charset="-122"/>
                 <a:cs typeface="Calibri" pitchFamily="34" charset="-120"/>
               </a:rPr>
-              <a:t>faster asset growth than a non-rural credit union of the same size, in the same state and quarter</a:t>
+              <a:t>faster asset growth each year than a non-rural credit union of the same size, in the same state and quarter</a:t>
             </a:r>
             <a:endParaRPr lang="en-US" sz="1000" dirty="0"/>
           </a:p>
@@ -32771,7 +32796,7 @@
                 <a:ea typeface="Cambria" pitchFamily="34" charset="-122"/>
                 <a:cs typeface="Cambria" pitchFamily="34" charset="-120"/>
               </a:rPr>
-              <a:t>+0.17 pp</a:t>
+              <a:t>+0.2 point</a:t>
             </a:r>
             <a:endParaRPr lang="en-US" sz="2600" dirty="0"/>
           </a:p>
@@ -32813,7 +32838,7 @@
                 <a:ea typeface="Calibri" pitchFamily="34" charset="-122"/>
                 <a:cs typeface="Calibri" pitchFamily="34" charset="-120"/>
               </a:rPr>
-              <a:t>higher return on assets on that same like-for-like comparison, and +0.23 pp when matched one-to-one on size</a:t>
+              <a:t>higher return on assets on that same like-for-like comparison, and a slightly wider gap when matched one-to-one on size</a:t>
             </a:r>
             <a:endParaRPr lang="en-US" sz="1000" dirty="0"/>
           </a:p>
@@ -32920,7 +32945,7 @@
                 <a:ea typeface="Cambria" pitchFamily="34" charset="-122"/>
                 <a:cs typeface="Cambria" pitchFamily="34" charset="-120"/>
               </a:rPr>
-              <a:t>25% less likely</a:t>
+              <a:t>25% safer</a:t>
             </a:r>
             <a:endParaRPr lang="en-US" sz="1900" dirty="0"/>
           </a:p>
@@ -32962,7 +32987,7 @@
                 <a:ea typeface="Calibri" pitchFamily="34" charset="-122"/>
                 <a:cs typeface="Calibri" pitchFamily="34" charset="-120"/>
               </a:rPr>
-              <a:t>to disappear. Over the period 37% of rural credit unions merged away or closed, against 44% elsewhere — and the gap holds after allowing for size and financial condition</a:t>
+              <a:t>over the decade 37% of rural credit unions closed or merged away, against 44% elsewhere</a:t>
             </a:r>
             <a:endParaRPr lang="en-US" sz="1000" dirty="0"/>
           </a:p>
@@ -33182,7 +33207,7 @@
                 <a:ea typeface="Calibri" pitchFamily="34" charset="-122"/>
                 <a:cs typeface="Calibri" pitchFamily="34" charset="-120"/>
               </a:rPr>
-              <a:t>Sec. 909 presumes rural credit unions underperform on growth, capital adequacy and profitability — the statute's words for what we would call earnings. On growth and earnings they outperform; on capital they are neither ahead nor behind and are not constrained; they survive better, and their office networks have grown faster. The recommendations therefore belong under the de novo clause — barriers to establishing new rural credit unions.</a:t>
+              <a:t>Sec. 909 is written as though rural credit unions were underperforming on growth, capital adequacy and profitability. On growth and earnings they outperform; on capital they are neither ahead nor behind, and not constrained; they survive better, and their office networks have grown faster. So the recommendations should not be about rescuing weak institutions — they should be about coverage: extending the credit unions that already exist, and making it possible to start new ones.</a:t>
             </a:r>
             <a:endParaRPr lang="en-US" sz="1200" dirty="0"/>
           </a:p>
@@ -33293,7 +33318,7 @@
                 <a:ea typeface="Cambria" pitchFamily="34" charset="-122"/>
                 <a:cs typeface="Cambria" pitchFamily="34" charset="-120"/>
               </a:rPr>
-              <a:t>Rural credit unions opened offices. Urban ones fell behind.</a:t>
+              <a:t>Rural credit unions opened offices. The rest fell behind.</a:t>
             </a:r>
             <a:endParaRPr lang="en-US" sz="2700" dirty="0"/>
           </a:p>
@@ -33335,7 +33360,7 @@
                 <a:ea typeface="Calibri" pitchFamily="34" charset="-122"/>
                 <a:cs typeface="Calibri" pitchFamily="34" charset="-120"/>
               </a:rPr>
-              <a:t>Over the ten years to 2026, the number of credit union offices in rural counties grew faster than in the rest of the country — while the rural population was shrinking and the urban population was growing.</a:t>
+              <a:t>Over the ten years to 2026, the number of credit union offices in rural counties grew faster than in the rest of the country — while the rural population shrank and the non-rural population grew.</a:t>
             </a:r>
             <a:endParaRPr lang="en-US" sz="1350" dirty="0"/>
           </a:p>
@@ -33529,7 +33554,7 @@
                 <a:ea typeface="Calibri" pitchFamily="34" charset="-122"/>
                 <a:cs typeface="Calibri" pitchFamily="34" charset="-120"/>
               </a:rPr>
-              <a:t>Urban offices grew too</a:t>
+              <a:t>Elsewhere they grew too</a:t>
             </a:r>
             <a:endParaRPr lang="en-US" sz="1200" dirty="0"/>
           </a:p>
@@ -33831,7 +33856,7 @@
                 <a:ea typeface="Cambria" pitchFamily="34" charset="-122"/>
                 <a:cs typeface="Cambria" pitchFamily="34" charset="-120"/>
               </a:rPr>
-              <a:t>But most rural counties saw nothing change at all</a:t>
+              <a:t>Most rural counties saw nothing change at all</a:t>
             </a:r>
             <a:endParaRPr lang="en-US" sz="2700" dirty="0"/>
           </a:p>
@@ -33873,7 +33898,7 @@
                 <a:ea typeface="Calibri" pitchFamily="34" charset="-122"/>
                 <a:cs typeface="Calibri" pitchFamily="34" charset="-120"/>
               </a:rPr>
-              <a:t>The national totals are driven by a minority of counties. For the typical rural county, the past decade was stasis — and for nearly half, there was no credit union office to begin with.</a:t>
+              <a:t>Those national totals are driven by a minority of counties. For the typical rural county the past decade brought no change at all — and for nearly half, there was no credit union office to begin with.</a:t>
             </a:r>
             <a:endParaRPr lang="en-US" sz="1350" dirty="0"/>
           </a:p>
@@ -38678,7 +38703,7 @@
                 <a:ea typeface="Calibri" pitchFamily="34" charset="-122"/>
                 <a:cs typeface="Calibri" pitchFamily="34" charset="-120"/>
               </a:rPr>
-              <a:t>Sec. 909 sits among the nine community banking provisions carried in the ROAD to Housing Act. Subsection lettering to be confirmed against the enrolled text.</a:t>
+              <a:t>Sec. 909 sits in Title IX, the community banking title of the ROAD to Housing Act, and requires two parallel studies — a joint one from the bank regulators and a separate one from NCUA. Subsection lettering to be confirmed against the enrolled text.</a:t>
             </a:r>
             <a:endParaRPr lang="en-US" sz="900" dirty="0"/>
           </a:p>
